--- a/Zeroth review - Legal RAG.pptx
+++ b/Zeroth review - Legal RAG.pptx
@@ -12236,12 +12236,49 @@
             <p:ph type="subTitle" idx="1"/>
           </p:nvPr>
         </p:nvSpPr>
-        <p:spPr/>
-        <p:txBody>
-          <a:bodyPr/>
-          <a:lstStyle/>
-          <a:p>
-            <a:endParaRPr lang="en-IN"/>
+        <p:spPr>
+          <a:xfrm>
+            <a:off x="2983043" y="5514858"/>
+            <a:ext cx="9144000" cy="1343142"/>
+          </a:xfrm>
+        </p:spPr>
+        <p:txBody>
+          <a:bodyPr>
+            <a:normAutofit/>
+          </a:bodyPr>
+          <a:lstStyle/>
+          <a:p>
+            <a:pPr algn="r">
+              <a:spcBef>
+                <a:spcPts val="0"/>
+              </a:spcBef>
+            </a:pPr>
+            <a:r>
+              <a:rPr lang="en-GB" sz="2000" dirty="0"/>
+              <a:t>By:-Aryan Arora</a:t>
+            </a:r>
+          </a:p>
+          <a:p>
+            <a:pPr algn="r">
+              <a:spcBef>
+                <a:spcPts val="0"/>
+              </a:spcBef>
+            </a:pPr>
+            <a:r>
+              <a:rPr lang="en-GB" sz="2000" dirty="0"/>
+              <a:t>VIT Chennai</a:t>
+            </a:r>
+          </a:p>
+          <a:p>
+            <a:pPr algn="r">
+              <a:spcBef>
+                <a:spcPts val="0"/>
+              </a:spcBef>
+            </a:pPr>
+            <a:r>
+              <a:rPr lang="en-IN" sz="2000" dirty="0"/>
+              <a:t>DS &amp; AI</a:t>
+            </a:r>
           </a:p>
         </p:txBody>
       </p:sp>
@@ -12383,7 +12420,12 @@
             <p:ph type="title"/>
           </p:nvPr>
         </p:nvSpPr>
-        <p:spPr/>
+        <p:spPr>
+          <a:xfrm>
+            <a:off x="301752" y="869140"/>
+            <a:ext cx="4959796" cy="969206"/>
+          </a:xfrm>
+        </p:spPr>
         <p:txBody>
           <a:bodyPr>
             <a:normAutofit/>
@@ -12414,16 +12456,324 @@
             <p:ph idx="1"/>
           </p:nvPr>
         </p:nvSpPr>
-        <p:spPr/>
+        <p:spPr>
+          <a:xfrm>
+            <a:off x="301752" y="2047284"/>
+            <a:ext cx="4959796" cy="4234643"/>
+          </a:xfrm>
+        </p:spPr>
         <p:txBody>
           <a:bodyPr>
+            <a:normAutofit lnSpcReduction="10000"/>
+          </a:bodyPr>
+          <a:lstStyle/>
+          <a:p>
+            <a:r>
+              <a:rPr lang="en-US" sz="2400" dirty="0"/>
+              <a:t>A RAG application over the Indian Kanoon corpus and uploaded case files using legal-domain embeddings, two-stage hybrid retrieval, and LLM-based holding extraction, enabling advocates to find relevant precedents, extract ratio decidendi, and auto-draft structured argument outlines with citation-linked evidence.</a:t>
+            </a:r>
+            <a:endParaRPr lang="en-IN" sz="2400" dirty="0"/>
+          </a:p>
+        </p:txBody>
+      </p:sp>
+      <p:sp>
+        <p:nvSpPr>
+          <p:cNvPr id="4" name="Title 1">
+            <a:extLst>
+              <a:ext uri="{FF2B5EF4-FFF2-40B4-BE49-F238E27FC236}">
+                <a16:creationId xmlns:a16="http://schemas.microsoft.com/office/drawing/2014/main" id="{F1D3638D-97BD-028E-C952-7A47A2F72A65}"/>
+              </a:ext>
+            </a:extLst>
+          </p:cNvPr>
+          <p:cNvSpPr txBox="1">
+            <a:spLocks/>
+          </p:cNvSpPr>
+          <p:nvPr/>
+        </p:nvSpPr>
+        <p:spPr>
+          <a:xfrm>
+            <a:off x="6930454" y="869140"/>
+            <a:ext cx="4959796" cy="969206"/>
+          </a:xfrm>
+          <a:prstGeom prst="rect">
+            <a:avLst/>
+          </a:prstGeom>
+        </p:spPr>
+        <p:txBody>
+          <a:bodyPr vert="horz" lIns="91440" tIns="45720" rIns="91440" bIns="45720" rtlCol="0" anchor="b">
+            <a:normAutofit fontScale="92500"/>
+          </a:bodyPr>
+          <a:lstStyle>
+            <a:lvl1pPr algn="l" defTabSz="914400" rtl="0" eaLnBrk="1" latinLnBrk="0" hangingPunct="1">
+              <a:lnSpc>
+                <a:spcPct val="85000"/>
+              </a:lnSpc>
+              <a:spcBef>
+                <a:spcPct val="0"/>
+              </a:spcBef>
+              <a:buNone/>
+              <a:defRPr sz="2800" b="0" kern="1200" spc="0" baseline="0">
+                <a:solidFill>
+                  <a:schemeClr val="tx1"/>
+                </a:solidFill>
+                <a:latin typeface="+mj-lt"/>
+                <a:ea typeface="+mj-ea"/>
+                <a:cs typeface="+mj-cs"/>
+              </a:defRPr>
+            </a:lvl1pPr>
+          </a:lstStyle>
+          <a:p>
+            <a:r>
+              <a:rPr lang="en-US" sz="4400" dirty="0"/>
+              <a:t>Expected Outcomes</a:t>
+            </a:r>
+            <a:endParaRPr lang="en-IN" sz="4400" dirty="0"/>
+          </a:p>
+        </p:txBody>
+      </p:sp>
+      <p:sp>
+        <p:nvSpPr>
+          <p:cNvPr id="6" name="Content Placeholder 2">
+            <a:extLst>
+              <a:ext uri="{FF2B5EF4-FFF2-40B4-BE49-F238E27FC236}">
+                <a16:creationId xmlns:a16="http://schemas.microsoft.com/office/drawing/2014/main" id="{9197EFFC-BE8A-B779-3ACF-0BE68B5D3F1D}"/>
+              </a:ext>
+            </a:extLst>
+          </p:cNvPr>
+          <p:cNvSpPr txBox="1">
+            <a:spLocks/>
+          </p:cNvSpPr>
+          <p:nvPr/>
+        </p:nvSpPr>
+        <p:spPr>
+          <a:xfrm>
+            <a:off x="6930454" y="2047283"/>
+            <a:ext cx="4959796" cy="4234643"/>
+          </a:xfrm>
+          <a:prstGeom prst="rect">
+            <a:avLst/>
+          </a:prstGeom>
+        </p:spPr>
+        <p:txBody>
+          <a:bodyPr vert="horz" lIns="91440" tIns="45720" rIns="91440" bIns="45720" rtlCol="0">
             <a:normAutofit/>
           </a:bodyPr>
-          <a:lstStyle/>
-          <a:p>
-            <a:r>
-              <a:rPr lang="en-US" sz="2400" dirty="0"/>
-              <a:t>A RAG application over the Indian Kanoon corpus and uploaded case files using legal-domain embeddings, two-stage hybrid retrieval, and LLM-based holding extraction, enabling advocates to find relevant precedents, extract ratio decidendi, and auto-draft structured argument outlines with citation-linked evidence.</a:t>
+          <a:lstStyle>
+            <a:lvl1pPr marL="0" indent="0" algn="l" defTabSz="914400" rtl="0" eaLnBrk="1" latinLnBrk="0" hangingPunct="1">
+              <a:lnSpc>
+                <a:spcPct val="120000"/>
+              </a:lnSpc>
+              <a:spcBef>
+                <a:spcPts val="1000"/>
+              </a:spcBef>
+              <a:buFont typeface="Arial" panose="020B0604020202020204" pitchFamily="34" charset="0"/>
+              <a:buNone/>
+              <a:defRPr sz="1400" kern="1200" spc="0">
+                <a:solidFill>
+                  <a:schemeClr val="tx1"/>
+                </a:solidFill>
+                <a:latin typeface="+mn-lt"/>
+                <a:ea typeface="+mn-ea"/>
+                <a:cs typeface="+mn-cs"/>
+              </a:defRPr>
+            </a:lvl1pPr>
+            <a:lvl2pPr marL="228600" indent="0" algn="l" defTabSz="914400" rtl="0" eaLnBrk="1" latinLnBrk="0" hangingPunct="1">
+              <a:lnSpc>
+                <a:spcPct val="120000"/>
+              </a:lnSpc>
+              <a:spcBef>
+                <a:spcPts val="500"/>
+              </a:spcBef>
+              <a:buFont typeface="Arial" panose="020B0604020202020204" pitchFamily="34" charset="0"/>
+              <a:buNone/>
+              <a:defRPr sz="1400" kern="1200" spc="0">
+                <a:solidFill>
+                  <a:schemeClr val="tx1"/>
+                </a:solidFill>
+                <a:latin typeface="+mn-lt"/>
+                <a:ea typeface="+mn-ea"/>
+                <a:cs typeface="+mn-cs"/>
+              </a:defRPr>
+            </a:lvl2pPr>
+            <a:lvl3pPr marL="457200" indent="0" algn="l" defTabSz="914400" rtl="0" eaLnBrk="1" latinLnBrk="0" hangingPunct="1">
+              <a:lnSpc>
+                <a:spcPct val="120000"/>
+              </a:lnSpc>
+              <a:spcBef>
+                <a:spcPts val="500"/>
+              </a:spcBef>
+              <a:buFont typeface="Arial" panose="020B0604020202020204" pitchFamily="34" charset="0"/>
+              <a:buNone/>
+              <a:defRPr sz="1400" kern="1200" spc="0">
+                <a:solidFill>
+                  <a:schemeClr val="tx1"/>
+                </a:solidFill>
+                <a:latin typeface="+mn-lt"/>
+                <a:ea typeface="+mn-ea"/>
+                <a:cs typeface="+mn-cs"/>
+              </a:defRPr>
+            </a:lvl3pPr>
+            <a:lvl4pPr marL="685800" indent="0" algn="l" defTabSz="914400" rtl="0" eaLnBrk="1" latinLnBrk="0" hangingPunct="1">
+              <a:lnSpc>
+                <a:spcPct val="120000"/>
+              </a:lnSpc>
+              <a:spcBef>
+                <a:spcPts val="500"/>
+              </a:spcBef>
+              <a:buFont typeface="Arial" panose="020B0604020202020204" pitchFamily="34" charset="0"/>
+              <a:buNone/>
+              <a:defRPr sz="1400" kern="1200" spc="0">
+                <a:solidFill>
+                  <a:schemeClr val="tx1"/>
+                </a:solidFill>
+                <a:latin typeface="+mn-lt"/>
+                <a:ea typeface="+mn-ea"/>
+                <a:cs typeface="+mn-cs"/>
+              </a:defRPr>
+            </a:lvl4pPr>
+            <a:lvl5pPr marL="914400" indent="0" algn="l" defTabSz="914400" rtl="0" eaLnBrk="1" latinLnBrk="0" hangingPunct="1">
+              <a:lnSpc>
+                <a:spcPct val="120000"/>
+              </a:lnSpc>
+              <a:spcBef>
+                <a:spcPts val="500"/>
+              </a:spcBef>
+              <a:buFont typeface="Arial" panose="020B0604020202020204" pitchFamily="34" charset="0"/>
+              <a:buNone/>
+              <a:defRPr sz="1400" kern="1200" spc="0">
+                <a:solidFill>
+                  <a:schemeClr val="tx1"/>
+                </a:solidFill>
+                <a:latin typeface="+mn-lt"/>
+                <a:ea typeface="+mn-ea"/>
+                <a:cs typeface="+mn-cs"/>
+              </a:defRPr>
+            </a:lvl5pPr>
+            <a:lvl6pPr marL="2514600" indent="-228600" algn="l" defTabSz="914400" rtl="0" eaLnBrk="1" latinLnBrk="0" hangingPunct="1">
+              <a:lnSpc>
+                <a:spcPct val="90000"/>
+              </a:lnSpc>
+              <a:spcBef>
+                <a:spcPts val="500"/>
+              </a:spcBef>
+              <a:buFont typeface="Arial" panose="020B0604020202020204" pitchFamily="34" charset="0"/>
+              <a:buChar char="•"/>
+              <a:defRPr sz="1800" kern="1200">
+                <a:solidFill>
+                  <a:schemeClr val="tx1"/>
+                </a:solidFill>
+                <a:latin typeface="+mn-lt"/>
+                <a:ea typeface="+mn-ea"/>
+                <a:cs typeface="+mn-cs"/>
+              </a:defRPr>
+            </a:lvl6pPr>
+            <a:lvl7pPr marL="2971800" indent="-228600" algn="l" defTabSz="914400" rtl="0" eaLnBrk="1" latinLnBrk="0" hangingPunct="1">
+              <a:lnSpc>
+                <a:spcPct val="90000"/>
+              </a:lnSpc>
+              <a:spcBef>
+                <a:spcPts val="500"/>
+              </a:spcBef>
+              <a:buFont typeface="Arial" panose="020B0604020202020204" pitchFamily="34" charset="0"/>
+              <a:buChar char="•"/>
+              <a:defRPr sz="1800" kern="1200">
+                <a:solidFill>
+                  <a:schemeClr val="tx1"/>
+                </a:solidFill>
+                <a:latin typeface="+mn-lt"/>
+                <a:ea typeface="+mn-ea"/>
+                <a:cs typeface="+mn-cs"/>
+              </a:defRPr>
+            </a:lvl7pPr>
+            <a:lvl8pPr marL="3429000" indent="-228600" algn="l" defTabSz="914400" rtl="0" eaLnBrk="1" latinLnBrk="0" hangingPunct="1">
+              <a:lnSpc>
+                <a:spcPct val="90000"/>
+              </a:lnSpc>
+              <a:spcBef>
+                <a:spcPts val="500"/>
+              </a:spcBef>
+              <a:buFont typeface="Arial" panose="020B0604020202020204" pitchFamily="34" charset="0"/>
+              <a:buChar char="•"/>
+              <a:defRPr sz="1800" kern="1200">
+                <a:solidFill>
+                  <a:schemeClr val="tx1"/>
+                </a:solidFill>
+                <a:latin typeface="+mn-lt"/>
+                <a:ea typeface="+mn-ea"/>
+                <a:cs typeface="+mn-cs"/>
+              </a:defRPr>
+            </a:lvl8pPr>
+            <a:lvl9pPr marL="3886200" indent="-228600" algn="l" defTabSz="914400" rtl="0" eaLnBrk="1" latinLnBrk="0" hangingPunct="1">
+              <a:lnSpc>
+                <a:spcPct val="90000"/>
+              </a:lnSpc>
+              <a:spcBef>
+                <a:spcPts val="500"/>
+              </a:spcBef>
+              <a:buFont typeface="Arial" panose="020B0604020202020204" pitchFamily="34" charset="0"/>
+              <a:buChar char="•"/>
+              <a:defRPr sz="1800" kern="1200">
+                <a:solidFill>
+                  <a:schemeClr val="tx1"/>
+                </a:solidFill>
+                <a:latin typeface="+mn-lt"/>
+                <a:ea typeface="+mn-ea"/>
+                <a:cs typeface="+mn-cs"/>
+              </a:defRPr>
+            </a:lvl9pPr>
+          </a:lstStyle>
+          <a:p>
+            <a:pPr marL="457200" indent="-457200">
+              <a:buFont typeface="+mj-lt"/>
+              <a:buAutoNum type="arabicPeriod"/>
+            </a:pPr>
+            <a:r>
+              <a:rPr lang="en-GB" sz="2400" dirty="0"/>
+              <a:t>Intelligent legal document search</a:t>
+            </a:r>
+          </a:p>
+          <a:p>
+            <a:pPr marL="457200" indent="-457200">
+              <a:buFont typeface="+mj-lt"/>
+              <a:buAutoNum type="arabicPeriod"/>
+            </a:pPr>
+            <a:r>
+              <a:rPr lang="en-GB" sz="2400" dirty="0"/>
+              <a:t>Relevant precedent identification</a:t>
+            </a:r>
+          </a:p>
+          <a:p>
+            <a:pPr marL="457200" indent="-457200">
+              <a:buFont typeface="+mj-lt"/>
+              <a:buAutoNum type="arabicPeriod"/>
+            </a:pPr>
+            <a:r>
+              <a:rPr lang="en-GB" sz="2400" dirty="0"/>
+              <a:t>Automatic extraction of legal reasoning</a:t>
+            </a:r>
+          </a:p>
+          <a:p>
+            <a:pPr marL="457200" indent="-457200">
+              <a:buFont typeface="+mj-lt"/>
+              <a:buAutoNum type="arabicPeriod"/>
+            </a:pPr>
+            <a:r>
+              <a:rPr lang="en-GB" sz="2400" dirty="0"/>
+              <a:t>Citation backed answers</a:t>
+            </a:r>
+          </a:p>
+          <a:p>
+            <a:pPr marL="457200" indent="-457200">
+              <a:buFont typeface="+mj-lt"/>
+              <a:buAutoNum type="arabicPeriod"/>
+            </a:pPr>
+            <a:r>
+              <a:rPr lang="en-GB" sz="2400" dirty="0"/>
+              <a:t>Automatic argument </a:t>
+            </a:r>
+            <a:r>
+              <a:rPr lang="en-GB" sz="2400"/>
+              <a:t>outline generation</a:t>
             </a:r>
             <a:endParaRPr lang="en-IN" sz="2400" dirty="0"/>
           </a:p>
